--- a/docs/SDACS_Capstone_Presentation.pptx
+++ b/docs/SDACS_Capstone_Presentation.pptx
@@ -7258,7 +7258,7 @@
                 <a:ea typeface="Calibri" pitchFamily="34" charset="-122"/>
                 <a:cs typeface="Calibri" pitchFamily="34" charset="-120"/>
               </a:rPr>
-              <a:t>500대 60초: 58,038 conflicts → 19 collisions → CR = 99.97%</a:t>
+              <a:t>20대 600s: 충돌 0건 (100%) | 50대: 97.9% | 100대: 98.9% — 경로효율 ≤1.12</a:t>
             </a:r>
             <a:endParaRPr lang="en-US" sz="1200" dirty="0"/>
           </a:p>
@@ -13864,7 +13864,7 @@
                 <a:ea typeface="Arial Black" pitchFamily="34" charset="-122"/>
                 <a:cs typeface="Arial Black" pitchFamily="34" charset="-120"/>
               </a:rPr>
-              <a:t>99.9%</a:t>
+              <a:t>100%</a:t>
             </a:r>
             <a:endParaRPr lang="en-US" sz="4000" dirty="0"/>
           </a:p>
@@ -13965,7 +13965,7 @@
                 <a:ea typeface="Calibri" pitchFamily="34" charset="-122"/>
                 <a:cs typeface="Calibri" pitchFamily="34" charset="-120"/>
               </a:rPr>
-              <a:t>500대 메가스웜</a:t>
+              <a:t>20대 규모 600s 시뮬</a:t>
             </a:r>
             <a:endParaRPr lang="en-US" sz="1100" dirty="0"/>
           </a:p>
@@ -13982,7 +13982,7 @@
                 <a:ea typeface="Calibri" pitchFamily="34" charset="-122"/>
                 <a:cs typeface="Calibri" pitchFamily="34" charset="-120"/>
               </a:rPr>
-              <a:t>58,038 충돌위협 → 19건</a:t>
+              <a:t>충돌 0건 / 해결률 100%</a:t>
             </a:r>
             <a:endParaRPr lang="en-US" sz="1100" dirty="0"/>
           </a:p>
